--- a/01 Classes/Aula 04 - Aplicação Cloud Indústria 40 Python IoT Plataforma Arduino Tinkercad Prática.pptx
+++ b/01 Classes/Aula 04 - Aplicação Cloud Indústria 40 Python IoT Plataforma Arduino Tinkercad Prática.pptx
@@ -7696,7 +7696,7 @@
                 <a:latin typeface="Times New Roman" panose="02020603050405020304" pitchFamily="18" charset="0"/>
                 <a:cs typeface="Times New Roman" panose="02020603050405020304" pitchFamily="18" charset="0"/>
               </a:rPr>
-              <a:t> tempo 1000</a:t>
+              <a:t> tempo 1000				// https://youtu.be/vB6_cf0G3VM</a:t>
             </a:r>
           </a:p>
           <a:p>
@@ -7729,7 +7729,7 @@
                 <a:latin typeface="Times New Roman" panose="02020603050405020304" pitchFamily="18" charset="0"/>
                 <a:cs typeface="Times New Roman" panose="02020603050405020304" pitchFamily="18" charset="0"/>
               </a:rPr>
-              <a:t> = 12</a:t>
+              <a:t> = 12	// https://www.youtube.com/shorts/juxRSrEHPBo?feature=share</a:t>
             </a:r>
           </a:p>
           <a:p>

--- a/01 Classes/Aula 04 - Aplicação Cloud Indústria 40 Python IoT Plataforma Arduino Tinkercad Prática.pptx
+++ b/01 Classes/Aula 04 - Aplicação Cloud Indústria 40 Python IoT Plataforma Arduino Tinkercad Prática.pptx
@@ -7567,6 +7567,86 @@
           </a:p>
         </p:txBody>
       </p:sp>
+      <p:sp>
+        <p:nvSpPr>
+          <p:cNvPr id="3" name="CaixaDeTexto 2">
+            <a:extLst>
+              <a:ext uri="{FF2B5EF4-FFF2-40B4-BE49-F238E27FC236}">
+                <a16:creationId xmlns:a16="http://schemas.microsoft.com/office/drawing/2014/main" id="{424D291B-1CB5-37B4-42E6-337551CE3F4E}"/>
+              </a:ext>
+            </a:extLst>
+          </p:cNvPr>
+          <p:cNvSpPr txBox="1"/>
+          <p:nvPr/>
+        </p:nvSpPr>
+        <p:spPr>
+          <a:xfrm>
+            <a:off x="6843749" y="3767435"/>
+            <a:ext cx="2003612" cy="461665"/>
+          </a:xfrm>
+          <a:prstGeom prst="rect">
+            <a:avLst/>
+          </a:prstGeom>
+          <a:noFill/>
+          <a:ln w="12700" cap="flat">
+            <a:noFill/>
+            <a:miter lim="400000"/>
+          </a:ln>
+          <a:effectLst/>
+        </p:spPr>
+        <p:style>
+          <a:lnRef idx="0">
+            <a:scrgbClr r="0" g="0" b="0"/>
+          </a:lnRef>
+          <a:fillRef idx="0">
+            <a:scrgbClr r="0" g="0" b="0"/>
+          </a:fillRef>
+          <a:effectRef idx="0">
+            <a:scrgbClr r="0" g="0" b="0"/>
+          </a:effectRef>
+          <a:fontRef idx="none"/>
+        </p:style>
+        <p:txBody>
+          <a:bodyPr wrap="square">
+            <a:spAutoFit/>
+          </a:bodyPr>
+          <a:lstStyle/>
+          <a:p>
+            <a:r>
+              <a:rPr lang="pt-BR" sz="1200" b="1" dirty="0">
+                <a:solidFill>
+                  <a:srgbClr val="FF0000"/>
+                </a:solidFill>
+                <a:latin typeface="Times New Roman" panose="02020603050405020304" pitchFamily="18" charset="0"/>
+                <a:cs typeface="Times New Roman" panose="02020603050405020304" pitchFamily="18" charset="0"/>
+              </a:rPr>
+              <a:t>Solução:</a:t>
+            </a:r>
+          </a:p>
+          <a:p>
+            <a:r>
+              <a:rPr lang="pt-BR" sz="1200" b="1" dirty="0" err="1">
+                <a:solidFill>
+                  <a:srgbClr val="FF0000"/>
+                </a:solidFill>
+                <a:latin typeface="Times New Roman" panose="02020603050405020304" pitchFamily="18" charset="0"/>
+                <a:cs typeface="Times New Roman" panose="02020603050405020304" pitchFamily="18" charset="0"/>
+              </a:rPr>
+              <a:t>int</a:t>
+            </a:r>
+            <a:r>
+              <a:rPr lang="pt-BR" sz="1200" b="1" dirty="0">
+                <a:solidFill>
+                  <a:srgbClr val="FF0000"/>
+                </a:solidFill>
+                <a:latin typeface="Times New Roman" panose="02020603050405020304" pitchFamily="18" charset="0"/>
+                <a:cs typeface="Times New Roman" panose="02020603050405020304" pitchFamily="18" charset="0"/>
+              </a:rPr>
+              <a:t> leds[] = {9, 10, 11, 12};</a:t>
+            </a:r>
+          </a:p>
+        </p:txBody>
+      </p:sp>
     </p:spTree>
     <p:extLst>
       <p:ext uri="{BB962C8B-B14F-4D97-AF65-F5344CB8AC3E}">
@@ -8578,21 +8658,7 @@
                 <a:latin typeface="Times New Roman" panose="02020603050405020304" pitchFamily="18" charset="0"/>
                 <a:cs typeface="Times New Roman" panose="02020603050405020304" pitchFamily="18" charset="0"/>
               </a:rPr>
-              <a:t> </a:t>
-            </a:r>
-            <a:r>
-              <a:rPr lang="pt-BR" sz="2000">
-                <a:latin typeface="Times New Roman" panose="02020603050405020304" pitchFamily="18" charset="0"/>
-                <a:cs typeface="Times New Roman" panose="02020603050405020304" pitchFamily="18" charset="0"/>
-              </a:rPr>
-              <a:t>= 1; </a:t>
-            </a:r>
-            <a:r>
-              <a:rPr lang="pt-BR" sz="2000" dirty="0">
-                <a:latin typeface="Times New Roman" panose="02020603050405020304" pitchFamily="18" charset="0"/>
-                <a:cs typeface="Times New Roman" panose="02020603050405020304" pitchFamily="18" charset="0"/>
-              </a:rPr>
-              <a:t>// contador de segundos</a:t>
+              <a:t> = 1; // contador de segundos</a:t>
             </a:r>
           </a:p>
           <a:p>
@@ -9065,6 +9131,119 @@
               <a:latin typeface="Times New Roman" panose="02020603050405020304" pitchFamily="18" charset="0"/>
               <a:cs typeface="Times New Roman" panose="02020603050405020304" pitchFamily="18" charset="0"/>
             </a:endParaRPr>
+          </a:p>
+        </p:txBody>
+      </p:sp>
+      <p:sp>
+        <p:nvSpPr>
+          <p:cNvPr id="3" name="CaixaDeTexto 2">
+            <a:extLst>
+              <a:ext uri="{FF2B5EF4-FFF2-40B4-BE49-F238E27FC236}">
+                <a16:creationId xmlns:a16="http://schemas.microsoft.com/office/drawing/2014/main" id="{795488A6-D79B-9BA7-8FBA-B6B72DF85A8B}"/>
+              </a:ext>
+            </a:extLst>
+          </p:cNvPr>
+          <p:cNvSpPr txBox="1"/>
+          <p:nvPr/>
+        </p:nvSpPr>
+        <p:spPr>
+          <a:xfrm>
+            <a:off x="4435921" y="914398"/>
+            <a:ext cx="4572000" cy="1384995"/>
+          </a:xfrm>
+          <a:prstGeom prst="rect">
+            <a:avLst/>
+          </a:prstGeom>
+          <a:noFill/>
+          <a:ln w="12700" cap="flat">
+            <a:noFill/>
+            <a:miter lim="400000"/>
+          </a:ln>
+          <a:effectLst/>
+        </p:spPr>
+        <p:style>
+          <a:lnRef idx="0">
+            <a:scrgbClr r="0" g="0" b="0"/>
+          </a:lnRef>
+          <a:fillRef idx="0">
+            <a:scrgbClr r="0" g="0" b="0"/>
+          </a:fillRef>
+          <a:effectRef idx="0">
+            <a:scrgbClr r="0" g="0" b="0"/>
+          </a:effectRef>
+          <a:fontRef idx="none"/>
+        </p:style>
+        <p:txBody>
+          <a:bodyPr wrap="square">
+            <a:spAutoFit/>
+          </a:bodyPr>
+          <a:lstStyle/>
+          <a:p>
+            <a:r>
+              <a:rPr lang="pt-BR" sz="1400" dirty="0">
+                <a:latin typeface="Times New Roman" panose="02020603050405020304" pitchFamily="18" charset="0"/>
+                <a:cs typeface="Times New Roman" panose="02020603050405020304" pitchFamily="18" charset="0"/>
+              </a:rPr>
+              <a:t>GND: Pino GND do LCD ao GND do Arduino.</a:t>
+            </a:r>
+          </a:p>
+          <a:p>
+            <a:r>
+              <a:rPr lang="pt-BR" sz="1400" dirty="0">
+                <a:latin typeface="Times New Roman" panose="02020603050405020304" pitchFamily="18" charset="0"/>
+                <a:cs typeface="Times New Roman" panose="02020603050405020304" pitchFamily="18" charset="0"/>
+              </a:rPr>
+              <a:t>VCC: Pino VCC do LCD ao 5V do Arduino.</a:t>
+            </a:r>
+          </a:p>
+          <a:p>
+            <a:r>
+              <a:rPr lang="pt-BR" sz="1400" dirty="0">
+                <a:latin typeface="Times New Roman" panose="02020603050405020304" pitchFamily="18" charset="0"/>
+                <a:cs typeface="Times New Roman" panose="02020603050405020304" pitchFamily="18" charset="0"/>
+              </a:rPr>
+              <a:t>SDA: Pino SDA do módulo I2C ao pino </a:t>
+            </a:r>
+            <a:r>
+              <a:rPr lang="pt-BR" sz="1400" b="1" dirty="0">
+                <a:latin typeface="Times New Roman" panose="02020603050405020304" pitchFamily="18" charset="0"/>
+                <a:cs typeface="Times New Roman" panose="02020603050405020304" pitchFamily="18" charset="0"/>
+              </a:rPr>
+              <a:t>A4</a:t>
+            </a:r>
+            <a:r>
+              <a:rPr lang="pt-BR" sz="1400" dirty="0">
+                <a:latin typeface="Times New Roman" panose="02020603050405020304" pitchFamily="18" charset="0"/>
+                <a:cs typeface="Times New Roman" panose="02020603050405020304" pitchFamily="18" charset="0"/>
+              </a:rPr>
+              <a:t> (no Uno/Nano) do Arduino.</a:t>
+            </a:r>
+          </a:p>
+          <a:p>
+            <a:r>
+              <a:rPr lang="pt-BR" sz="1400" dirty="0">
+                <a:latin typeface="Times New Roman" panose="02020603050405020304" pitchFamily="18" charset="0"/>
+                <a:cs typeface="Times New Roman" panose="02020603050405020304" pitchFamily="18" charset="0"/>
+              </a:rPr>
+              <a:t>SCL: Pino SCL do módulo I2C ao pino </a:t>
+            </a:r>
+            <a:r>
+              <a:rPr lang="pt-BR" sz="1400" b="1" dirty="0">
+                <a:solidFill>
+                  <a:srgbClr val="FF0000"/>
+                </a:solidFill>
+                <a:latin typeface="Times New Roman" panose="02020603050405020304" pitchFamily="18" charset="0"/>
+                <a:cs typeface="Times New Roman" panose="02020603050405020304" pitchFamily="18" charset="0"/>
+              </a:rPr>
+              <a:t>A5</a:t>
+            </a:r>
+            <a:r>
+              <a:rPr lang="pt-BR" sz="1400" dirty="0">
+                <a:latin typeface="Times New Roman" panose="02020603050405020304" pitchFamily="18" charset="0"/>
+                <a:cs typeface="Times New Roman" panose="02020603050405020304" pitchFamily="18" charset="0"/>
+              </a:rPr>
+              <a:t> (no Uno/Nano) do Arduino. </a:t>
+            </a:r>
           </a:p>
         </p:txBody>
       </p:sp>
@@ -9869,6 +10048,86 @@
               <a:latin typeface="Times New Roman" panose="02020603050405020304" pitchFamily="18" charset="0"/>
               <a:cs typeface="Times New Roman" panose="02020603050405020304" pitchFamily="18" charset="0"/>
             </a:endParaRPr>
+          </a:p>
+        </p:txBody>
+      </p:sp>
+      <p:sp>
+        <p:nvSpPr>
+          <p:cNvPr id="2" name="CaixaDeTexto 1">
+            <a:extLst>
+              <a:ext uri="{FF2B5EF4-FFF2-40B4-BE49-F238E27FC236}">
+                <a16:creationId xmlns:a16="http://schemas.microsoft.com/office/drawing/2014/main" id="{648DF661-8007-602F-A418-4665E4810078}"/>
+              </a:ext>
+            </a:extLst>
+          </p:cNvPr>
+          <p:cNvSpPr txBox="1"/>
+          <p:nvPr/>
+        </p:nvSpPr>
+        <p:spPr>
+          <a:xfrm>
+            <a:off x="7000916" y="3350577"/>
+            <a:ext cx="2003612" cy="461665"/>
+          </a:xfrm>
+          <a:prstGeom prst="rect">
+            <a:avLst/>
+          </a:prstGeom>
+          <a:noFill/>
+          <a:ln w="12700" cap="flat">
+            <a:noFill/>
+            <a:miter lim="400000"/>
+          </a:ln>
+          <a:effectLst/>
+        </p:spPr>
+        <p:style>
+          <a:lnRef idx="0">
+            <a:scrgbClr r="0" g="0" b="0"/>
+          </a:lnRef>
+          <a:fillRef idx="0">
+            <a:scrgbClr r="0" g="0" b="0"/>
+          </a:fillRef>
+          <a:effectRef idx="0">
+            <a:scrgbClr r="0" g="0" b="0"/>
+          </a:effectRef>
+          <a:fontRef idx="none"/>
+        </p:style>
+        <p:txBody>
+          <a:bodyPr wrap="square">
+            <a:spAutoFit/>
+          </a:bodyPr>
+          <a:lstStyle/>
+          <a:p>
+            <a:r>
+              <a:rPr lang="pt-BR" sz="1200" b="1" dirty="0">
+                <a:solidFill>
+                  <a:srgbClr val="FF0000"/>
+                </a:solidFill>
+                <a:latin typeface="Times New Roman" panose="02020603050405020304" pitchFamily="18" charset="0"/>
+                <a:cs typeface="Times New Roman" panose="02020603050405020304" pitchFamily="18" charset="0"/>
+              </a:rPr>
+              <a:t>Solução:</a:t>
+            </a:r>
+          </a:p>
+          <a:p>
+            <a:r>
+              <a:rPr lang="pt-BR" sz="1200" b="1" dirty="0" err="1">
+                <a:solidFill>
+                  <a:srgbClr val="FF0000"/>
+                </a:solidFill>
+                <a:latin typeface="Times New Roman" panose="02020603050405020304" pitchFamily="18" charset="0"/>
+                <a:cs typeface="Times New Roman" panose="02020603050405020304" pitchFamily="18" charset="0"/>
+              </a:rPr>
+              <a:t>int</a:t>
+            </a:r>
+            <a:r>
+              <a:rPr lang="pt-BR" sz="1200" b="1" dirty="0">
+                <a:solidFill>
+                  <a:srgbClr val="FF0000"/>
+                </a:solidFill>
+                <a:latin typeface="Times New Roman" panose="02020603050405020304" pitchFamily="18" charset="0"/>
+                <a:cs typeface="Times New Roman" panose="02020603050405020304" pitchFamily="18" charset="0"/>
+              </a:rPr>
+              <a:t> leds[] = {9, 10, 11, 12};</a:t>
+            </a:r>
           </a:p>
         </p:txBody>
       </p:sp>
